--- a/figures/architecture/main.pptx
+++ b/figures/architecture/main.pptx
@@ -5493,12 +5493,12 @@
         </p:nvSpPr>
         <p:spPr>
           <a:xfrm>
-            <a:off x="0" y="2651640"/>
-            <a:ext cx="914400" cy="1463160"/>
+            <a:off x="0" y="2374425"/>
+            <a:ext cx="914400" cy="1740375"/>
           </a:xfrm>
           <a:prstGeom prst="roundRect">
             <a:avLst>
-              <a:gd name="adj" fmla="val 16667"/>
+              <a:gd name="adj" fmla="val 4030"/>
             </a:avLst>
           </a:prstGeom>
           <a:solidFill>
@@ -5538,6 +5538,74 @@
           </a:p>
         </p:txBody>
       </p:sp>
+      <p:cxnSp>
+        <p:nvCxnSpPr>
+          <p:cNvPr id="193" name="Google Shape;62;p13">
+            <a:extLst>
+              <a:ext uri="{FF2B5EF4-FFF2-40B4-BE49-F238E27FC236}">
+                <a16:creationId xmlns:a16="http://schemas.microsoft.com/office/drawing/2014/main" id="{5E0C6176-5234-5191-8EC8-2171B3FBC52A}"/>
+              </a:ext>
+            </a:extLst>
+          </p:cNvPr>
+          <p:cNvCxnSpPr>
+            <a:cxnSpLocks/>
+          </p:cNvCxnSpPr>
+          <p:nvPr/>
+        </p:nvCxnSpPr>
+        <p:spPr>
+          <a:xfrm>
+            <a:off x="459016" y="2694125"/>
+            <a:ext cx="131" cy="137124"/>
+          </a:xfrm>
+          <a:prstGeom prst="straightConnector1">
+            <a:avLst/>
+          </a:prstGeom>
+          <a:noFill/>
+          <a:ln w="19050" cap="flat" cmpd="sng">
+            <a:solidFill>
+              <a:srgbClr val="000000"/>
+            </a:solidFill>
+            <a:prstDash val="solid"/>
+            <a:miter lim="800000"/>
+            <a:headEnd type="none" w="sm" len="sm"/>
+            <a:tailEnd type="triangle" w="med" len="med"/>
+          </a:ln>
+        </p:spPr>
+      </p:cxnSp>
+      <p:cxnSp>
+        <p:nvCxnSpPr>
+          <p:cNvPr id="200" name="Google Shape;62;p13">
+            <a:extLst>
+              <a:ext uri="{FF2B5EF4-FFF2-40B4-BE49-F238E27FC236}">
+                <a16:creationId xmlns:a16="http://schemas.microsoft.com/office/drawing/2014/main" id="{DB2E0917-AA24-3164-616A-3510F79A6D91}"/>
+              </a:ext>
+            </a:extLst>
+          </p:cNvPr>
+          <p:cNvCxnSpPr>
+            <a:cxnSpLocks/>
+          </p:cNvCxnSpPr>
+          <p:nvPr/>
+        </p:nvCxnSpPr>
+        <p:spPr>
+          <a:xfrm>
+            <a:off x="459016" y="3961626"/>
+            <a:ext cx="131" cy="137124"/>
+          </a:xfrm>
+          <a:prstGeom prst="straightConnector1">
+            <a:avLst/>
+          </a:prstGeom>
+          <a:noFill/>
+          <a:ln w="19050" cap="flat" cmpd="sng">
+            <a:solidFill>
+              <a:srgbClr val="000000"/>
+            </a:solidFill>
+            <a:prstDash val="solid"/>
+            <a:miter lim="800000"/>
+            <a:headEnd type="none" w="sm" len="sm"/>
+            <a:tailEnd type="triangle" w="med" len="med"/>
+          </a:ln>
+        </p:spPr>
+      </p:cxnSp>
       <p:sp>
         <p:nvSpPr>
           <p:cNvPr id="3" name="Google Shape;56;p13">
@@ -5603,122 +5671,56 @@
           </a:p>
         </p:txBody>
       </p:sp>
-      <p:grpSp>
-        <p:nvGrpSpPr>
-          <p:cNvPr id="4" name="Group 3">
-            <a:extLst>
-              <a:ext uri="{FF2B5EF4-FFF2-40B4-BE49-F238E27FC236}">
-                <a16:creationId xmlns:a16="http://schemas.microsoft.com/office/drawing/2014/main" id="{285A6E64-4750-D7D3-E18F-CC35A1B12592}"/>
-              </a:ext>
-            </a:extLst>
-          </p:cNvPr>
-          <p:cNvGrpSpPr/>
-          <p:nvPr/>
-        </p:nvGrpSpPr>
-        <p:grpSpPr>
-          <a:xfrm>
-            <a:off x="43950" y="2697516"/>
-            <a:ext cx="822960" cy="1371444"/>
-            <a:chOff x="129829" y="2697516"/>
-            <a:chExt cx="822960" cy="1371444"/>
-          </a:xfrm>
-        </p:grpSpPr>
-        <p:cxnSp>
-          <p:nvCxnSpPr>
-            <p:cNvPr id="5" name="Google Shape;55;p13">
-              <a:extLst>
-                <a:ext uri="{FF2B5EF4-FFF2-40B4-BE49-F238E27FC236}">
-                  <a16:creationId xmlns:a16="http://schemas.microsoft.com/office/drawing/2014/main" id="{6E6B7485-4A55-ACE1-22AE-80C241D0E9A6}"/>
-                </a:ext>
-              </a:extLst>
-            </p:cNvPr>
-            <p:cNvCxnSpPr>
-              <a:cxnSpLocks/>
-              <a:stCxn id="10" idx="2"/>
-            </p:cNvCxnSpPr>
-            <p:nvPr/>
-          </p:nvCxnSpPr>
-          <p:spPr>
-            <a:xfrm>
-              <a:off x="541309" y="3931800"/>
-              <a:ext cx="0" cy="137160"/>
-            </a:xfrm>
-            <a:prstGeom prst="straightConnector1">
-              <a:avLst/>
-            </a:prstGeom>
-            <a:noFill/>
-            <a:ln w="19050" cap="flat" cmpd="sng">
-              <a:solidFill>
-                <a:srgbClr val="000000"/>
-              </a:solidFill>
-              <a:prstDash val="solid"/>
-              <a:miter lim="800000"/>
-              <a:headEnd type="none" w="sm" len="sm"/>
-              <a:tailEnd type="triangle" w="med" len="med"/>
-            </a:ln>
-          </p:spPr>
-        </p:cxnSp>
-        <p:sp>
-          <p:nvSpPr>
-            <p:cNvPr id="6" name="Google Shape;57;p13">
-              <a:extLst>
-                <a:ext uri="{FF2B5EF4-FFF2-40B4-BE49-F238E27FC236}">
-                  <a16:creationId xmlns:a16="http://schemas.microsoft.com/office/drawing/2014/main" id="{918FEEE2-A9C5-6D86-E74E-7BB3A1CE9956}"/>
-                </a:ext>
-              </a:extLst>
-            </p:cNvPr>
-            <p:cNvSpPr/>
-            <p:nvPr/>
-          </p:nvSpPr>
-          <p:spPr>
-            <a:xfrm>
-              <a:off x="129829" y="2834640"/>
-              <a:ext cx="822960" cy="274200"/>
-            </a:xfrm>
-            <a:prstGeom prst="rect">
-              <a:avLst/>
-            </a:prstGeom>
+      <p:sp>
+        <p:nvSpPr>
+          <p:cNvPr id="6" name="Google Shape;57;p13">
+            <a:extLst>
+              <a:ext uri="{FF2B5EF4-FFF2-40B4-BE49-F238E27FC236}">
+                <a16:creationId xmlns:a16="http://schemas.microsoft.com/office/drawing/2014/main" id="{918FEEE2-A9C5-6D86-E74E-7BB3A1CE9956}"/>
+              </a:ext>
+            </a:extLst>
+          </p:cNvPr>
+          <p:cNvSpPr/>
+          <p:nvPr/>
+        </p:nvSpPr>
+        <p:spPr>
+          <a:xfrm>
+            <a:off x="47601" y="2527438"/>
+            <a:ext cx="822960" cy="180000"/>
+          </a:xfrm>
+          <a:prstGeom prst="rect">
+            <a:avLst/>
+          </a:prstGeom>
+          <a:solidFill>
+            <a:srgbClr val="FFF2CC"/>
+          </a:solidFill>
+          <a:ln w="12700" cap="flat" cmpd="sng">
             <a:solidFill>
-              <a:srgbClr val="FFF2CC"/>
+              <a:srgbClr val="000000"/>
             </a:solidFill>
-            <a:ln w="12700" cap="flat" cmpd="sng">
-              <a:solidFill>
-                <a:srgbClr val="000000"/>
-              </a:solidFill>
-              <a:prstDash val="solid"/>
-              <a:miter lim="800000"/>
-              <a:headEnd type="none" w="sm" len="sm"/>
-              <a:tailEnd type="none" w="sm" len="sm"/>
-            </a:ln>
-          </p:spPr>
-          <p:txBody>
-            <a:bodyPr spcFirstLastPara="1" wrap="square" lIns="91425" tIns="45700" rIns="91425" bIns="45700" anchor="ctr" anchorCtr="0">
-              <a:noAutofit/>
-            </a:bodyPr>
-            <a:lstStyle/>
-            <a:p>
-              <a:pPr marL="0" marR="0" lvl="0" indent="0" algn="ctr" rtl="0">
-                <a:spcBef>
-                  <a:spcPts val="0"/>
-                </a:spcBef>
-                <a:spcAft>
-                  <a:spcPts val="0"/>
-                </a:spcAft>
-                <a:buNone/>
-              </a:pPr>
-              <a:r>
-                <a:rPr lang="en" sz="1000" dirty="0">
-                  <a:solidFill>
-                    <a:srgbClr val="000000"/>
-                  </a:solidFill>
-                  <a:latin typeface="Arial"/>
-                  <a:ea typeface="Arial"/>
-                  <a:cs typeface="Arial"/>
-                  <a:sym typeface="Arial"/>
-                </a:rPr>
-                <a:t>Linear (C)</a:t>
-              </a:r>
-              <a:endParaRPr sz="1000" dirty="0">
+            <a:prstDash val="solid"/>
+            <a:miter lim="800000"/>
+            <a:headEnd type="none" w="sm" len="sm"/>
+            <a:tailEnd type="none" w="sm" len="sm"/>
+          </a:ln>
+        </p:spPr>
+        <p:txBody>
+          <a:bodyPr spcFirstLastPara="1" wrap="square" lIns="91425" tIns="45700" rIns="91425" bIns="45700" anchor="ctr" anchorCtr="0">
+            <a:noAutofit/>
+          </a:bodyPr>
+          <a:lstStyle/>
+          <a:p>
+            <a:pPr marL="0" marR="0" lvl="0" indent="0" algn="ctr" rtl="0">
+              <a:spcBef>
+                <a:spcPts val="0"/>
+              </a:spcBef>
+              <a:spcAft>
+                <a:spcPts val="0"/>
+              </a:spcAft>
+              <a:buNone/>
+            </a:pPr>
+            <a:r>
+              <a:rPr lang="en" sz="1000" dirty="0">
                 <a:solidFill>
                   <a:srgbClr val="000000"/>
                 </a:solidFill>
@@ -5726,71 +5728,71 @@
                 <a:ea typeface="Arial"/>
                 <a:cs typeface="Arial"/>
                 <a:sym typeface="Arial"/>
-              </a:endParaRPr>
-            </a:p>
-          </p:txBody>
-        </p:sp>
-        <p:sp>
-          <p:nvSpPr>
-            <p:cNvPr id="7" name="Google Shape;58;p13">
-              <a:extLst>
-                <a:ext uri="{FF2B5EF4-FFF2-40B4-BE49-F238E27FC236}">
-                  <a16:creationId xmlns:a16="http://schemas.microsoft.com/office/drawing/2014/main" id="{462376BC-99AE-9496-40A4-17C7FDCAA184}"/>
-                </a:ext>
-              </a:extLst>
-            </p:cNvPr>
-            <p:cNvSpPr/>
-            <p:nvPr/>
-          </p:nvSpPr>
-          <p:spPr>
-            <a:xfrm>
-              <a:off x="129829" y="3246120"/>
-              <a:ext cx="822960" cy="274200"/>
-            </a:xfrm>
-            <a:prstGeom prst="rect">
-              <a:avLst/>
-            </a:prstGeom>
-            <a:solidFill>
-              <a:srgbClr val="FFF2CC"/>
-            </a:solidFill>
-            <a:ln w="12700" cap="flat" cmpd="sng">
+              </a:rPr>
+              <a:t>Linear (C)</a:t>
+            </a:r>
+            <a:endParaRPr sz="1000" dirty="0">
               <a:solidFill>
                 <a:srgbClr val="000000"/>
               </a:solidFill>
-              <a:prstDash val="solid"/>
-              <a:miter lim="800000"/>
-              <a:headEnd type="none" w="sm" len="sm"/>
-              <a:tailEnd type="none" w="sm" len="sm"/>
-            </a:ln>
-          </p:spPr>
-          <p:txBody>
-            <a:bodyPr spcFirstLastPara="1" wrap="square" lIns="91425" tIns="45700" rIns="91425" bIns="45700" anchor="ctr" anchorCtr="0">
-              <a:noAutofit/>
-            </a:bodyPr>
-            <a:lstStyle/>
-            <a:p>
-              <a:pPr marL="0" marR="0" lvl="0" indent="0" algn="ctr" rtl="0">
-                <a:spcBef>
-                  <a:spcPts val="0"/>
-                </a:spcBef>
-                <a:spcAft>
-                  <a:spcPts val="0"/>
-                </a:spcAft>
-                <a:buNone/>
-              </a:pPr>
-              <a:r>
-                <a:rPr lang="en" sz="1000">
-                  <a:solidFill>
-                    <a:srgbClr val="000000"/>
-                  </a:solidFill>
-                  <a:latin typeface="Arial"/>
-                  <a:ea typeface="Arial"/>
-                  <a:cs typeface="Arial"/>
-                  <a:sym typeface="Arial"/>
-                </a:rPr>
-                <a:t>Linear (C)</a:t>
-              </a:r>
-              <a:endParaRPr sz="1000">
+              <a:latin typeface="Arial"/>
+              <a:ea typeface="Arial"/>
+              <a:cs typeface="Arial"/>
+              <a:sym typeface="Arial"/>
+            </a:endParaRPr>
+          </a:p>
+        </p:txBody>
+      </p:sp>
+      <p:sp>
+        <p:nvSpPr>
+          <p:cNvPr id="7" name="Google Shape;58;p13">
+            <a:extLst>
+              <a:ext uri="{FF2B5EF4-FFF2-40B4-BE49-F238E27FC236}">
+                <a16:creationId xmlns:a16="http://schemas.microsoft.com/office/drawing/2014/main" id="{462376BC-99AE-9496-40A4-17C7FDCAA184}"/>
+              </a:ext>
+            </a:extLst>
+          </p:cNvPr>
+          <p:cNvSpPr/>
+          <p:nvPr/>
+        </p:nvSpPr>
+        <p:spPr>
+          <a:xfrm>
+            <a:off x="47601" y="3153650"/>
+            <a:ext cx="822960" cy="180000"/>
+          </a:xfrm>
+          <a:prstGeom prst="rect">
+            <a:avLst/>
+          </a:prstGeom>
+          <a:solidFill>
+            <a:srgbClr val="FFF2CC"/>
+          </a:solidFill>
+          <a:ln w="12700" cap="flat" cmpd="sng">
+            <a:solidFill>
+              <a:srgbClr val="000000"/>
+            </a:solidFill>
+            <a:prstDash val="solid"/>
+            <a:miter lim="800000"/>
+            <a:headEnd type="none" w="sm" len="sm"/>
+            <a:tailEnd type="none" w="sm" len="sm"/>
+          </a:ln>
+        </p:spPr>
+        <p:txBody>
+          <a:bodyPr spcFirstLastPara="1" wrap="square" lIns="91425" tIns="45700" rIns="91425" bIns="45700" anchor="ctr" anchorCtr="0">
+            <a:noAutofit/>
+          </a:bodyPr>
+          <a:lstStyle/>
+          <a:p>
+            <a:pPr marL="0" marR="0" lvl="0" indent="0" algn="ctr" rtl="0">
+              <a:spcBef>
+                <a:spcPts val="0"/>
+              </a:spcBef>
+              <a:spcAft>
+                <a:spcPts val="0"/>
+              </a:spcAft>
+              <a:buNone/>
+            </a:pPr>
+            <a:r>
+              <a:rPr lang="en" sz="1000" dirty="0">
                 <a:solidFill>
                   <a:srgbClr val="000000"/>
                 </a:solidFill>
@@ -5798,188 +5800,55 @@
                 <a:ea typeface="Arial"/>
                 <a:cs typeface="Arial"/>
                 <a:sym typeface="Arial"/>
-              </a:endParaRPr>
-            </a:p>
-          </p:txBody>
-        </p:sp>
-        <p:cxnSp>
-          <p:nvCxnSpPr>
-            <p:cNvPr id="8" name="Google Shape;59;p13">
-              <a:extLst>
-                <a:ext uri="{FF2B5EF4-FFF2-40B4-BE49-F238E27FC236}">
-                  <a16:creationId xmlns:a16="http://schemas.microsoft.com/office/drawing/2014/main" id="{AAE34486-1C37-2966-9947-7FA7D1AD3D44}"/>
-                </a:ext>
-              </a:extLst>
-            </p:cNvPr>
-            <p:cNvCxnSpPr>
-              <a:stCxn id="6" idx="2"/>
-              <a:endCxn id="7" idx="0"/>
-            </p:cNvCxnSpPr>
-            <p:nvPr/>
-          </p:nvCxnSpPr>
-          <p:spPr>
-            <a:xfrm>
-              <a:off x="541309" y="3108840"/>
-              <a:ext cx="0" cy="137280"/>
-            </a:xfrm>
-            <a:prstGeom prst="straightConnector1">
-              <a:avLst/>
-            </a:prstGeom>
-            <a:noFill/>
-            <a:ln w="19050" cap="flat" cmpd="sng">
+              </a:rPr>
+              <a:t>Linear (C)</a:t>
+            </a:r>
+            <a:endParaRPr sz="1000" dirty="0">
               <a:solidFill>
                 <a:srgbClr val="000000"/>
               </a:solidFill>
-              <a:prstDash val="solid"/>
-              <a:miter lim="800000"/>
-              <a:headEnd type="none" w="sm" len="sm"/>
-              <a:tailEnd type="triangle" w="med" len="med"/>
-            </a:ln>
-          </p:spPr>
-        </p:cxnSp>
-        <p:cxnSp>
-          <p:nvCxnSpPr>
-            <p:cNvPr id="9" name="Google Shape;60;p13">
-              <a:extLst>
-                <a:ext uri="{FF2B5EF4-FFF2-40B4-BE49-F238E27FC236}">
-                  <a16:creationId xmlns:a16="http://schemas.microsoft.com/office/drawing/2014/main" id="{1397D8EF-89F2-E01C-B95E-7C14F2D5DBEE}"/>
-                </a:ext>
-              </a:extLst>
-            </p:cNvPr>
-            <p:cNvCxnSpPr>
-              <a:stCxn id="7" idx="2"/>
-              <a:endCxn id="10" idx="0"/>
-            </p:cNvCxnSpPr>
-            <p:nvPr/>
-          </p:nvCxnSpPr>
-          <p:spPr>
-            <a:xfrm>
-              <a:off x="541309" y="3520320"/>
-              <a:ext cx="0" cy="137280"/>
-            </a:xfrm>
-            <a:prstGeom prst="straightConnector1">
-              <a:avLst/>
-            </a:prstGeom>
-            <a:noFill/>
-            <a:ln w="19050" cap="flat" cmpd="sng">
-              <a:solidFill>
-                <a:srgbClr val="000000"/>
-              </a:solidFill>
-              <a:prstDash val="solid"/>
-              <a:miter lim="800000"/>
-              <a:headEnd type="none" w="sm" len="sm"/>
-              <a:tailEnd type="triangle" w="med" len="med"/>
-            </a:ln>
-          </p:spPr>
-        </p:cxnSp>
-        <p:sp>
-          <p:nvSpPr>
-            <p:cNvPr id="10" name="Google Shape;61;p13">
-              <a:extLst>
-                <a:ext uri="{FF2B5EF4-FFF2-40B4-BE49-F238E27FC236}">
-                  <a16:creationId xmlns:a16="http://schemas.microsoft.com/office/drawing/2014/main" id="{E9CB473D-4981-78A6-37D2-E5868DE00778}"/>
-                </a:ext>
-              </a:extLst>
-            </p:cNvPr>
-            <p:cNvSpPr/>
-            <p:nvPr/>
-          </p:nvSpPr>
-          <p:spPr>
-            <a:xfrm>
-              <a:off x="129829" y="3657600"/>
-              <a:ext cx="822960" cy="274200"/>
-            </a:xfrm>
-            <a:prstGeom prst="rect">
-              <a:avLst/>
-            </a:prstGeom>
+              <a:latin typeface="Arial"/>
+              <a:ea typeface="Arial"/>
+              <a:cs typeface="Arial"/>
+              <a:sym typeface="Arial"/>
+            </a:endParaRPr>
+          </a:p>
+        </p:txBody>
+      </p:sp>
+      <p:cxnSp>
+        <p:nvCxnSpPr>
+          <p:cNvPr id="11" name="Google Shape;62;p13">
+            <a:extLst>
+              <a:ext uri="{FF2B5EF4-FFF2-40B4-BE49-F238E27FC236}">
+                <a16:creationId xmlns:a16="http://schemas.microsoft.com/office/drawing/2014/main" id="{5725675D-3EF3-723B-863C-32F80C41FD70}"/>
+              </a:ext>
+            </a:extLst>
+          </p:cNvPr>
+          <p:cNvCxnSpPr>
+            <a:cxnSpLocks/>
+          </p:cNvCxnSpPr>
+          <p:nvPr/>
+        </p:nvCxnSpPr>
+        <p:spPr>
+          <a:xfrm>
+            <a:off x="459016" y="2388555"/>
+            <a:ext cx="131" cy="137124"/>
+          </a:xfrm>
+          <a:prstGeom prst="straightConnector1">
+            <a:avLst/>
+          </a:prstGeom>
+          <a:noFill/>
+          <a:ln w="19050" cap="flat" cmpd="sng">
             <a:solidFill>
-              <a:srgbClr val="E1EFD8"/>
+              <a:srgbClr val="000000"/>
             </a:solidFill>
-            <a:ln w="12700" cap="flat" cmpd="sng">
-              <a:solidFill>
-                <a:srgbClr val="000000"/>
-              </a:solidFill>
-              <a:prstDash val="solid"/>
-              <a:miter lim="800000"/>
-              <a:headEnd type="none" w="sm" len="sm"/>
-              <a:tailEnd type="none" w="sm" len="sm"/>
-            </a:ln>
-          </p:spPr>
-          <p:txBody>
-            <a:bodyPr spcFirstLastPara="1" wrap="square" lIns="91425" tIns="45700" rIns="91425" bIns="45700" anchor="ctr" anchorCtr="0">
-              <a:noAutofit/>
-            </a:bodyPr>
-            <a:lstStyle/>
-            <a:p>
-              <a:pPr marL="0" marR="0" lvl="0" indent="0" algn="ctr" rtl="0">
-                <a:spcBef>
-                  <a:spcPts val="0"/>
-                </a:spcBef>
-                <a:spcAft>
-                  <a:spcPts val="0"/>
-                </a:spcAft>
-                <a:buNone/>
-              </a:pPr>
-              <a:r>
-                <a:rPr lang="en" sz="1000">
-                  <a:solidFill>
-                    <a:srgbClr val="000000"/>
-                  </a:solidFill>
-                  <a:latin typeface="Arial"/>
-                  <a:ea typeface="Arial"/>
-                  <a:cs typeface="Arial"/>
-                  <a:sym typeface="Arial"/>
-                </a:rPr>
-                <a:t>Transpose</a:t>
-              </a:r>
-              <a:endParaRPr sz="1000">
-                <a:solidFill>
-                  <a:srgbClr val="000000"/>
-                </a:solidFill>
-                <a:latin typeface="Arial"/>
-                <a:ea typeface="Arial"/>
-                <a:cs typeface="Arial"/>
-                <a:sym typeface="Arial"/>
-              </a:endParaRPr>
-            </a:p>
-          </p:txBody>
-        </p:sp>
-        <p:cxnSp>
-          <p:nvCxnSpPr>
-            <p:cNvPr id="11" name="Google Shape;62;p13">
-              <a:extLst>
-                <a:ext uri="{FF2B5EF4-FFF2-40B4-BE49-F238E27FC236}">
-                  <a16:creationId xmlns:a16="http://schemas.microsoft.com/office/drawing/2014/main" id="{5725675D-3EF3-723B-863C-32F80C41FD70}"/>
-                </a:ext>
-              </a:extLst>
-            </p:cNvPr>
-            <p:cNvCxnSpPr>
-              <a:cxnSpLocks/>
-              <a:endCxn id="6" idx="0"/>
-            </p:cNvCxnSpPr>
-            <p:nvPr/>
-          </p:nvCxnSpPr>
-          <p:spPr>
-            <a:xfrm>
-              <a:off x="541309" y="2697516"/>
-              <a:ext cx="0" cy="137124"/>
-            </a:xfrm>
-            <a:prstGeom prst="straightConnector1">
-              <a:avLst/>
-            </a:prstGeom>
-            <a:noFill/>
-            <a:ln w="19050" cap="flat" cmpd="sng">
-              <a:solidFill>
-                <a:srgbClr val="000000"/>
-              </a:solidFill>
-              <a:prstDash val="solid"/>
-              <a:miter lim="800000"/>
-              <a:headEnd type="none" w="sm" len="sm"/>
-              <a:tailEnd type="triangle" w="med" len="med"/>
-            </a:ln>
-          </p:spPr>
-        </p:cxnSp>
-      </p:grpSp>
+            <a:prstDash val="solid"/>
+            <a:miter lim="800000"/>
+            <a:headEnd type="none" w="sm" len="sm"/>
+            <a:tailEnd type="triangle" w="med" len="med"/>
+          </a:ln>
+        </p:spPr>
+      </p:cxnSp>
       <p:sp>
         <p:nvSpPr>
           <p:cNvPr id="12" name="Google Shape;63;p13">
@@ -5994,7 +5863,7 @@
         </p:nvSpPr>
         <p:spPr>
           <a:xfrm>
-            <a:off x="1" y="2103120"/>
+            <a:off x="0" y="1867133"/>
             <a:ext cx="914400" cy="548700"/>
           </a:xfrm>
           <a:prstGeom prst="rect">
@@ -6075,7 +5944,7 @@
           </a:xfrm>
           <a:prstGeom prst="roundRect">
             <a:avLst>
-              <a:gd name="adj" fmla="val 5676"/>
+              <a:gd name="adj" fmla="val 2092"/>
             </a:avLst>
           </a:prstGeom>
           <a:solidFill>
@@ -6228,12 +6097,16 @@
               <a:buNone/>
             </a:pPr>
             <a:r>
-              <a:rPr lang="en" sz="1600" b="1" dirty="0">
+              <a:rPr lang="en" sz="1600" b="1" dirty="0" err="1"/>
+              <a:t>C</a:t>
+            </a:r>
+            <a:r>
+              <a:rPr lang="en" sz="1600" b="1" dirty="0" err="1">
                 <a:solidFill>
                   <a:srgbClr val="000000"/>
                 </a:solidFill>
               </a:rPr>
-              <a:t>RAUNet</a:t>
+              <a:t>UNet</a:t>
             </a:r>
             <a:r>
               <a:rPr lang="en" sz="1600" b="1" dirty="0"/>
@@ -6266,7 +6139,7 @@
           </a:xfrm>
           <a:prstGeom prst="roundRect">
             <a:avLst>
-              <a:gd name="adj" fmla="val 9260"/>
+              <a:gd name="adj" fmla="val 3422"/>
             </a:avLst>
           </a:prstGeom>
           <a:solidFill>
@@ -6424,7 +6297,7 @@
               <a:buNone/>
             </a:pPr>
             <a:r>
-              <a:rPr lang="en" sz="1000">
+              <a:rPr lang="en" sz="1000" dirty="0" err="1">
                 <a:solidFill>
                   <a:srgbClr val="000000"/>
                 </a:solidFill>
@@ -6433,9 +6306,21 @@
                 <a:cs typeface="Arial"/>
                 <a:sym typeface="Arial"/>
               </a:rPr>
-              <a:t>ReLU (C)</a:t>
+              <a:t>ReLU</a:t>
             </a:r>
-            <a:endParaRPr sz="1000">
+            <a:r>
+              <a:rPr lang="en" sz="1000" dirty="0">
+                <a:solidFill>
+                  <a:srgbClr val="000000"/>
+                </a:solidFill>
+                <a:latin typeface="Arial"/>
+                <a:ea typeface="Arial"/>
+                <a:cs typeface="Arial"/>
+                <a:sym typeface="Arial"/>
+              </a:rPr>
+              <a:t> (C)</a:t>
+            </a:r>
+            <a:endParaRPr sz="1000" dirty="0">
               <a:solidFill>
                 <a:srgbClr val="000000"/>
               </a:solidFill>
@@ -7291,7 +7176,7 @@
           </a:xfrm>
           <a:prstGeom prst="roundRect">
             <a:avLst>
-              <a:gd name="adj" fmla="val 16667"/>
+              <a:gd name="adj" fmla="val 3275"/>
             </a:avLst>
           </a:prstGeom>
           <a:solidFill>
@@ -8360,14 +8245,14 @@
               <a:buNone/>
             </a:pPr>
             <a:r>
-              <a:rPr lang="en" sz="1600" b="1">
+              <a:rPr lang="en" sz="1600" b="1" dirty="0">
                 <a:solidFill>
                   <a:srgbClr val="000000"/>
                 </a:solidFill>
               </a:rPr>
               <a:t>Residual Block (C)</a:t>
             </a:r>
-            <a:endParaRPr sz="1600" b="1">
+            <a:endParaRPr sz="1600" b="1" dirty="0">
               <a:solidFill>
                 <a:srgbClr val="000000"/>
               </a:solidFill>
@@ -11558,18 +11443,13 @@
                 <a:buNone/>
               </a:pPr>
               <a:r>
-                <a:rPr lang="en" sz="1200">
+                <a:rPr lang="en-US" sz="1200" dirty="0">
                   <a:solidFill>
                     <a:srgbClr val="000000"/>
                   </a:solidFill>
                 </a:rPr>
                 <a:t>[Residual Block (C)] × 2</a:t>
               </a:r>
-              <a:endParaRPr sz="1200">
-                <a:solidFill>
-                  <a:srgbClr val="000000"/>
-                </a:solidFill>
-              </a:endParaRPr>
             </a:p>
           </p:txBody>
         </p:sp>
@@ -12666,11 +12546,11 @@
         <p:spPr>
           <a:xfrm>
             <a:off x="465" y="271425"/>
-            <a:ext cx="914400" cy="1831695"/>
+            <a:ext cx="914400" cy="1606767"/>
           </a:xfrm>
           <a:prstGeom prst="roundRect">
             <a:avLst>
-              <a:gd name="adj" fmla="val 16667"/>
+              <a:gd name="adj" fmla="val 5128"/>
             </a:avLst>
           </a:prstGeom>
           <a:solidFill>
@@ -12707,12 +12587,128 @@
           </a:p>
         </p:txBody>
       </p:sp>
+      <p:cxnSp>
+        <p:nvCxnSpPr>
+          <p:cNvPr id="297" name="Google Shape;202;p13">
+            <a:extLst>
+              <a:ext uri="{FF2B5EF4-FFF2-40B4-BE49-F238E27FC236}">
+                <a16:creationId xmlns:a16="http://schemas.microsoft.com/office/drawing/2014/main" id="{A7C3C6DC-A0F0-978A-2494-F309BD65FBD4}"/>
+              </a:ext>
+            </a:extLst>
+          </p:cNvPr>
+          <p:cNvCxnSpPr>
+            <a:cxnSpLocks/>
+          </p:cNvCxnSpPr>
+          <p:nvPr/>
+        </p:nvCxnSpPr>
+        <p:spPr>
+          <a:xfrm>
+            <a:off x="448038" y="1405413"/>
+            <a:ext cx="0" cy="137160"/>
+          </a:xfrm>
+          <a:prstGeom prst="straightConnector1">
+            <a:avLst/>
+          </a:prstGeom>
+          <a:noFill/>
+          <a:ln w="19050" cap="flat" cmpd="sng">
+            <a:solidFill>
+              <a:srgbClr val="000000"/>
+            </a:solidFill>
+            <a:prstDash val="solid"/>
+            <a:miter lim="800000"/>
+            <a:headEnd type="none" w="sm" len="sm"/>
+            <a:tailEnd type="triangle" w="med" len="med"/>
+          </a:ln>
+        </p:spPr>
+      </p:cxnSp>
+      <p:cxnSp>
+        <p:nvCxnSpPr>
+          <p:cNvPr id="298" name="Google Shape;204;p13">
+            <a:extLst>
+              <a:ext uri="{FF2B5EF4-FFF2-40B4-BE49-F238E27FC236}">
+                <a16:creationId xmlns:a16="http://schemas.microsoft.com/office/drawing/2014/main" id="{BE52F484-3861-32B3-8A8A-B7C1E595B46C}"/>
+              </a:ext>
+            </a:extLst>
+          </p:cNvPr>
+          <p:cNvCxnSpPr>
+            <a:cxnSpLocks/>
+          </p:cNvCxnSpPr>
+          <p:nvPr/>
+        </p:nvCxnSpPr>
+        <p:spPr>
+          <a:xfrm>
+            <a:off x="448038" y="565534"/>
+            <a:ext cx="0" cy="137160"/>
+          </a:xfrm>
+          <a:prstGeom prst="straightConnector1">
+            <a:avLst/>
+          </a:prstGeom>
+          <a:noFill/>
+          <a:ln w="19050" cap="flat" cmpd="sng">
+            <a:solidFill>
+              <a:srgbClr val="000000"/>
+            </a:solidFill>
+            <a:prstDash val="solid"/>
+            <a:miter lim="800000"/>
+            <a:headEnd type="none" w="sm" len="sm"/>
+            <a:tailEnd type="triangle" w="med" len="med"/>
+          </a:ln>
+        </p:spPr>
+      </p:cxnSp>
       <p:sp>
         <p:nvSpPr>
-          <p:cNvPr id="292" name="Google Shape;197;p13">
-            <a:extLst>
-              <a:ext uri="{FF2B5EF4-FFF2-40B4-BE49-F238E27FC236}">
-                <a16:creationId xmlns:a16="http://schemas.microsoft.com/office/drawing/2014/main" id="{B7B75F42-5FFD-3A0A-D70F-7F794730A018}"/>
+          <p:cNvPr id="55" name="TextBox 54">
+            <a:extLst>
+              <a:ext uri="{FF2B5EF4-FFF2-40B4-BE49-F238E27FC236}">
+                <a16:creationId xmlns:a16="http://schemas.microsoft.com/office/drawing/2014/main" id="{601F66FD-D2D5-5383-34A9-973BAD277B06}"/>
+              </a:ext>
+            </a:extLst>
+          </p:cNvPr>
+          <p:cNvSpPr txBox="1"/>
+          <p:nvPr/>
+        </p:nvSpPr>
+        <p:spPr>
+          <a:xfrm>
+            <a:off x="-1" y="368816"/>
+            <a:ext cx="914400" cy="261610"/>
+          </a:xfrm>
+          <a:prstGeom prst="rect">
+            <a:avLst/>
+          </a:prstGeom>
+          <a:noFill/>
+        </p:spPr>
+        <p:txBody>
+          <a:bodyPr wrap="square">
+            <a:spAutoFit/>
+          </a:bodyPr>
+          <a:lstStyle/>
+          <a:p>
+            <a:pPr marL="0" lvl="0" indent="0" algn="ctr" rtl="0">
+              <a:spcBef>
+                <a:spcPts val="0"/>
+              </a:spcBef>
+              <a:spcAft>
+                <a:spcPts val="0"/>
+              </a:spcAft>
+              <a:buNone/>
+            </a:pPr>
+            <a:r>
+              <a:rPr lang="en-US" sz="1050" dirty="0">
+                <a:solidFill>
+                  <a:srgbClr val="000000"/>
+                </a:solidFill>
+              </a:rPr>
+              <a:t>IFT</a:t>
+            </a:r>
+          </a:p>
+        </p:txBody>
+      </p:sp>
+      <p:sp>
+        <p:nvSpPr>
+          <p:cNvPr id="56" name="Google Shape;61;p13">
+            <a:extLst>
+              <a:ext uri="{FF2B5EF4-FFF2-40B4-BE49-F238E27FC236}">
+                <a16:creationId xmlns:a16="http://schemas.microsoft.com/office/drawing/2014/main" id="{18A14C8F-7152-CFD0-0648-1E3AB4410D4A}"/>
               </a:ext>
             </a:extLst>
           </p:cNvPr>
@@ -12721,22 +12717,23 @@
         </p:nvSpPr>
         <p:spPr>
           <a:xfrm>
-            <a:off x="229065" y="456014"/>
-            <a:ext cx="457200" cy="457200"/>
-          </a:xfrm>
-          <a:prstGeom prst="roundRect">
-            <a:avLst>
-              <a:gd name="adj" fmla="val 16667"/>
-            </a:avLst>
+            <a:off x="36558" y="728239"/>
+            <a:ext cx="822960" cy="180000"/>
+          </a:xfrm>
+          <a:prstGeom prst="rect">
+            <a:avLst/>
           </a:prstGeom>
           <a:solidFill>
-            <a:schemeClr val="accent3">
-              <a:lumMod val="60000"/>
-              <a:lumOff val="40000"/>
-            </a:schemeClr>
+            <a:srgbClr val="E1EFD8"/>
           </a:solidFill>
-          <a:ln>
-            <a:noFill/>
+          <a:ln w="12700" cap="flat" cmpd="sng">
+            <a:solidFill>
+              <a:srgbClr val="000000"/>
+            </a:solidFill>
+            <a:prstDash val="solid"/>
+            <a:miter lim="800000"/>
+            <a:headEnd type="none" w="sm" len="sm"/>
+            <a:tailEnd type="none" w="sm" len="sm"/>
           </a:ln>
         </p:spPr>
         <p:txBody>
@@ -12754,9 +12751,139 @@
               </a:spcAft>
               <a:buNone/>
             </a:pPr>
-            <a:endParaRPr sz="1800">
+            <a:r>
+              <a:rPr lang="en" sz="1000" dirty="0">
+                <a:solidFill>
+                  <a:srgbClr val="000000"/>
+                </a:solidFill>
+                <a:latin typeface="Arial"/>
+                <a:ea typeface="Arial"/>
+                <a:cs typeface="Arial"/>
+                <a:sym typeface="Arial"/>
+              </a:rPr>
+              <a:t>Transpose</a:t>
+            </a:r>
+            <a:endParaRPr sz="1000" dirty="0">
               <a:solidFill>
-                <a:srgbClr val="FFFFFF"/>
+                <a:srgbClr val="000000"/>
+              </a:solidFill>
+              <a:latin typeface="Arial"/>
+              <a:ea typeface="Arial"/>
+              <a:cs typeface="Arial"/>
+              <a:sym typeface="Arial"/>
+            </a:endParaRPr>
+          </a:p>
+        </p:txBody>
+      </p:sp>
+      <p:cxnSp>
+        <p:nvCxnSpPr>
+          <p:cNvPr id="57" name="Google Shape;204;p13">
+            <a:extLst>
+              <a:ext uri="{FF2B5EF4-FFF2-40B4-BE49-F238E27FC236}">
+                <a16:creationId xmlns:a16="http://schemas.microsoft.com/office/drawing/2014/main" id="{4909492F-A496-1606-40EB-A23F21407F42}"/>
+              </a:ext>
+            </a:extLst>
+          </p:cNvPr>
+          <p:cNvCxnSpPr>
+            <a:cxnSpLocks/>
+          </p:cNvCxnSpPr>
+          <p:nvPr/>
+        </p:nvCxnSpPr>
+        <p:spPr>
+          <a:xfrm>
+            <a:off x="448038" y="923735"/>
+            <a:ext cx="0" cy="137160"/>
+          </a:xfrm>
+          <a:prstGeom prst="straightConnector1">
+            <a:avLst/>
+          </a:prstGeom>
+          <a:noFill/>
+          <a:ln w="19050" cap="flat" cmpd="sng">
+            <a:solidFill>
+              <a:srgbClr val="000000"/>
+            </a:solidFill>
+            <a:prstDash val="solid"/>
+            <a:miter lim="800000"/>
+            <a:headEnd type="none" w="sm" len="sm"/>
+            <a:tailEnd type="triangle" w="med" len="med"/>
+          </a:ln>
+        </p:spPr>
+      </p:cxnSp>
+      <p:sp>
+        <p:nvSpPr>
+          <p:cNvPr id="58" name="Google Shape;69;p13">
+            <a:extLst>
+              <a:ext uri="{FF2B5EF4-FFF2-40B4-BE49-F238E27FC236}">
+                <a16:creationId xmlns:a16="http://schemas.microsoft.com/office/drawing/2014/main" id="{7A93D145-B6B5-B700-4B4A-5D5566FE54F2}"/>
+              </a:ext>
+            </a:extLst>
+          </p:cNvPr>
+          <p:cNvSpPr/>
+          <p:nvPr/>
+        </p:nvSpPr>
+        <p:spPr>
+          <a:xfrm>
+            <a:off x="49288" y="2833008"/>
+            <a:ext cx="819586" cy="180000"/>
+          </a:xfrm>
+          <a:prstGeom prst="rect">
+            <a:avLst/>
+          </a:prstGeom>
+          <a:solidFill>
+            <a:srgbClr val="FFD966"/>
+          </a:solidFill>
+          <a:ln w="12700" cap="flat" cmpd="sng">
+            <a:solidFill>
+              <a:srgbClr val="000000"/>
+            </a:solidFill>
+            <a:prstDash val="solid"/>
+            <a:miter lim="800000"/>
+            <a:headEnd type="none" w="sm" len="sm"/>
+            <a:tailEnd type="none" w="sm" len="sm"/>
+          </a:ln>
+        </p:spPr>
+        <p:txBody>
+          <a:bodyPr spcFirstLastPara="1" wrap="square" lIns="0" tIns="45700" rIns="0" bIns="45700" anchor="ctr" anchorCtr="0">
+            <a:noAutofit/>
+          </a:bodyPr>
+          <a:lstStyle/>
+          <a:p>
+            <a:pPr marL="0" marR="0" lvl="0" indent="0" algn="ctr" rtl="0">
+              <a:spcBef>
+                <a:spcPts val="0"/>
+              </a:spcBef>
+              <a:spcAft>
+                <a:spcPts val="0"/>
+              </a:spcAft>
+              <a:buNone/>
+            </a:pPr>
+            <a:r>
+              <a:rPr lang="en" sz="1000" dirty="0" err="1">
+                <a:solidFill>
+                  <a:srgbClr val="000000"/>
+                </a:solidFill>
+                <a:latin typeface="Arial"/>
+                <a:ea typeface="Arial"/>
+                <a:cs typeface="Arial"/>
+                <a:sym typeface="Arial"/>
+              </a:rPr>
+              <a:t>LeakReLU</a:t>
+            </a:r>
+            <a:r>
+              <a:rPr lang="en" sz="1000" dirty="0">
+                <a:solidFill>
+                  <a:srgbClr val="000000"/>
+                </a:solidFill>
+                <a:latin typeface="Arial"/>
+                <a:ea typeface="Arial"/>
+                <a:cs typeface="Arial"/>
+                <a:sym typeface="Arial"/>
+              </a:rPr>
+              <a:t> (C)</a:t>
+            </a:r>
+            <a:endParaRPr sz="1000" dirty="0">
+              <a:solidFill>
+                <a:srgbClr val="000000"/>
               </a:solidFill>
               <a:latin typeface="Arial"/>
               <a:ea typeface="Arial"/>
@@ -12768,10 +12895,10 @@
       </p:sp>
       <p:sp>
         <p:nvSpPr>
-          <p:cNvPr id="293" name="Google Shape;198;p13">
-            <a:extLst>
-              <a:ext uri="{FF2B5EF4-FFF2-40B4-BE49-F238E27FC236}">
-                <a16:creationId xmlns:a16="http://schemas.microsoft.com/office/drawing/2014/main" id="{27F4B165-2C16-BFA4-EBBE-FA14031E61F0}"/>
+          <p:cNvPr id="10" name="Google Shape;61;p13">
+            <a:extLst>
+              <a:ext uri="{FF2B5EF4-FFF2-40B4-BE49-F238E27FC236}">
+                <a16:creationId xmlns:a16="http://schemas.microsoft.com/office/drawing/2014/main" id="{E9CB473D-4981-78A6-37D2-E5868DE00778}"/>
               </a:ext>
             </a:extLst>
           </p:cNvPr>
@@ -12780,22 +12907,23 @@
         </p:nvSpPr>
         <p:spPr>
           <a:xfrm>
-            <a:off x="229065" y="1450978"/>
-            <a:ext cx="457200" cy="457200"/>
-          </a:xfrm>
-          <a:prstGeom prst="roundRect">
-            <a:avLst>
-              <a:gd name="adj" fmla="val 16667"/>
-            </a:avLst>
+            <a:off x="36558" y="1537972"/>
+            <a:ext cx="822960" cy="180000"/>
+          </a:xfrm>
+          <a:prstGeom prst="rect">
+            <a:avLst/>
           </a:prstGeom>
           <a:solidFill>
-            <a:schemeClr val="accent3">
-              <a:lumMod val="60000"/>
-              <a:lumOff val="40000"/>
-            </a:schemeClr>
+            <a:srgbClr val="E1EFD8"/>
           </a:solidFill>
-          <a:ln>
-            <a:noFill/>
+          <a:ln w="12700" cap="flat" cmpd="sng">
+            <a:solidFill>
+              <a:srgbClr val="000000"/>
+            </a:solidFill>
+            <a:prstDash val="solid"/>
+            <a:miter lim="800000"/>
+            <a:headEnd type="none" w="sm" len="sm"/>
+            <a:tailEnd type="none" w="sm" len="sm"/>
           </a:ln>
         </p:spPr>
         <p:txBody>
@@ -12813,9 +12941,21 @@
               </a:spcAft>
               <a:buNone/>
             </a:pPr>
-            <a:endParaRPr sz="1800">
+            <a:r>
+              <a:rPr lang="en" sz="1000" dirty="0">
+                <a:solidFill>
+                  <a:srgbClr val="000000"/>
+                </a:solidFill>
+                <a:latin typeface="Arial"/>
+                <a:ea typeface="Arial"/>
+                <a:cs typeface="Arial"/>
+                <a:sym typeface="Arial"/>
+              </a:rPr>
+              <a:t>Transpose</a:t>
+            </a:r>
+            <a:endParaRPr sz="1000" dirty="0">
               <a:solidFill>
-                <a:srgbClr val="FFFFFF"/>
+                <a:srgbClr val="000000"/>
               </a:solidFill>
               <a:latin typeface="Arial"/>
               <a:ea typeface="Arial"/>
@@ -12827,31 +12967,39 @@
       </p:sp>
       <p:sp>
         <p:nvSpPr>
-          <p:cNvPr id="294" name="Google Shape;199;p13">
-            <a:extLst>
-              <a:ext uri="{FF2B5EF4-FFF2-40B4-BE49-F238E27FC236}">
-                <a16:creationId xmlns:a16="http://schemas.microsoft.com/office/drawing/2014/main" id="{DDF00D30-2E48-AB65-2020-EE3393457FA1}"/>
-              </a:ext>
-            </a:extLst>
-          </p:cNvPr>
-          <p:cNvSpPr txBox="1"/>
+          <p:cNvPr id="62" name="Google Shape;58;p13">
+            <a:extLst>
+              <a:ext uri="{FF2B5EF4-FFF2-40B4-BE49-F238E27FC236}">
+                <a16:creationId xmlns:a16="http://schemas.microsoft.com/office/drawing/2014/main" id="{35D5EF73-D284-354D-0D5B-60A67F576652}"/>
+              </a:ext>
+            </a:extLst>
+          </p:cNvPr>
+          <p:cNvSpPr/>
           <p:nvPr/>
         </p:nvSpPr>
         <p:spPr>
           <a:xfrm>
-            <a:off x="46185" y="1097238"/>
-            <a:ext cx="822960" cy="164700"/>
+            <a:off x="47601" y="3794934"/>
+            <a:ext cx="822960" cy="180000"/>
           </a:xfrm>
           <a:prstGeom prst="rect">
             <a:avLst/>
           </a:prstGeom>
-          <a:noFill/>
-          <a:ln>
-            <a:noFill/>
+          <a:solidFill>
+            <a:srgbClr val="FFF2CC"/>
+          </a:solidFill>
+          <a:ln w="12700" cap="flat" cmpd="sng">
+            <a:solidFill>
+              <a:srgbClr val="000000"/>
+            </a:solidFill>
+            <a:prstDash val="solid"/>
+            <a:miter lim="800000"/>
+            <a:headEnd type="none" w="sm" len="sm"/>
+            <a:tailEnd type="none" w="sm" len="sm"/>
           </a:ln>
         </p:spPr>
         <p:txBody>
-          <a:bodyPr spcFirstLastPara="1" wrap="square" lIns="0" tIns="0" rIns="0" bIns="0" anchor="ctr" anchorCtr="0">
+          <a:bodyPr spcFirstLastPara="1" wrap="square" lIns="91425" tIns="45700" rIns="91425" bIns="45700" anchor="ctr" anchorCtr="0">
             <a:noAutofit/>
           </a:bodyPr>
           <a:lstStyle/>
@@ -12863,31 +13011,122 @@
               <a:spcAft>
                 <a:spcPts val="0"/>
               </a:spcAft>
-              <a:buClr>
-                <a:srgbClr val="000000"/>
-              </a:buClr>
-              <a:buSzPts val="1800"/>
-              <a:buFont typeface="Arial"/>
               <a:buNone/>
             </a:pPr>
             <a:r>
-              <a:rPr lang="en" sz="1000" dirty="0"/>
-              <a:t>N * AFT block</a:t>
+              <a:rPr lang="en" sz="1000" dirty="0">
+                <a:solidFill>
+                  <a:srgbClr val="000000"/>
+                </a:solidFill>
+                <a:latin typeface="Arial"/>
+                <a:ea typeface="Arial"/>
+                <a:cs typeface="Arial"/>
+                <a:sym typeface="Arial"/>
+              </a:rPr>
+              <a:t>Linear (C)</a:t>
             </a:r>
             <a:endParaRPr sz="1000" dirty="0">
               <a:solidFill>
                 <a:srgbClr val="000000"/>
               </a:solidFill>
+              <a:latin typeface="Arial"/>
+              <a:ea typeface="Arial"/>
+              <a:cs typeface="Arial"/>
+              <a:sym typeface="Arial"/>
+            </a:endParaRPr>
+          </a:p>
+        </p:txBody>
+      </p:sp>
+      <p:sp>
+        <p:nvSpPr>
+          <p:cNvPr id="63" name="Google Shape;69;p13">
+            <a:extLst>
+              <a:ext uri="{FF2B5EF4-FFF2-40B4-BE49-F238E27FC236}">
+                <a16:creationId xmlns:a16="http://schemas.microsoft.com/office/drawing/2014/main" id="{7EE48BD4-1B3B-C98A-B6C9-30A6499D98FF}"/>
+              </a:ext>
+            </a:extLst>
+          </p:cNvPr>
+          <p:cNvSpPr/>
+          <p:nvPr/>
+        </p:nvSpPr>
+        <p:spPr>
+          <a:xfrm>
+            <a:off x="49288" y="3474292"/>
+            <a:ext cx="819586" cy="180000"/>
+          </a:xfrm>
+          <a:prstGeom prst="rect">
+            <a:avLst/>
+          </a:prstGeom>
+          <a:solidFill>
+            <a:srgbClr val="FFD966"/>
+          </a:solidFill>
+          <a:ln w="12700" cap="flat" cmpd="sng">
+            <a:solidFill>
+              <a:srgbClr val="000000"/>
+            </a:solidFill>
+            <a:prstDash val="solid"/>
+            <a:miter lim="800000"/>
+            <a:headEnd type="none" w="sm" len="sm"/>
+            <a:tailEnd type="none" w="sm" len="sm"/>
+          </a:ln>
+        </p:spPr>
+        <p:txBody>
+          <a:bodyPr spcFirstLastPara="1" wrap="square" lIns="0" tIns="45700" rIns="0" bIns="45700" anchor="ctr" anchorCtr="0">
+            <a:noAutofit/>
+          </a:bodyPr>
+          <a:lstStyle/>
+          <a:p>
+            <a:pPr marL="0" marR="0" lvl="0" indent="0" algn="ctr" rtl="0">
+              <a:spcBef>
+                <a:spcPts val="0"/>
+              </a:spcBef>
+              <a:spcAft>
+                <a:spcPts val="0"/>
+              </a:spcAft>
+              <a:buNone/>
+            </a:pPr>
+            <a:r>
+              <a:rPr lang="en" sz="1000" dirty="0" err="1">
+                <a:solidFill>
+                  <a:srgbClr val="000000"/>
+                </a:solidFill>
+                <a:latin typeface="Arial"/>
+                <a:ea typeface="Arial"/>
+                <a:cs typeface="Arial"/>
+                <a:sym typeface="Arial"/>
+              </a:rPr>
+              <a:t>LeakReLU</a:t>
+            </a:r>
+            <a:r>
+              <a:rPr lang="en" sz="1000" dirty="0">
+                <a:solidFill>
+                  <a:srgbClr val="000000"/>
+                </a:solidFill>
+                <a:latin typeface="Arial"/>
+                <a:ea typeface="Arial"/>
+                <a:cs typeface="Arial"/>
+                <a:sym typeface="Arial"/>
+              </a:rPr>
+              <a:t> (C)</a:t>
+            </a:r>
+            <a:endParaRPr sz="1000" dirty="0">
+              <a:solidFill>
+                <a:srgbClr val="000000"/>
+              </a:solidFill>
+              <a:latin typeface="Arial"/>
+              <a:ea typeface="Arial"/>
+              <a:cs typeface="Arial"/>
+              <a:sym typeface="Arial"/>
             </a:endParaRPr>
           </a:p>
         </p:txBody>
       </p:sp>
       <p:cxnSp>
         <p:nvCxnSpPr>
-          <p:cNvPr id="295" name="Google Shape;200;p13">
-            <a:extLst>
-              <a:ext uri="{FF2B5EF4-FFF2-40B4-BE49-F238E27FC236}">
-                <a16:creationId xmlns:a16="http://schemas.microsoft.com/office/drawing/2014/main" id="{17F28C1F-F369-1551-3BB8-DD876ED59E93}"/>
+          <p:cNvPr id="192" name="Google Shape;62;p13">
+            <a:extLst>
+              <a:ext uri="{FF2B5EF4-FFF2-40B4-BE49-F238E27FC236}">
+                <a16:creationId xmlns:a16="http://schemas.microsoft.com/office/drawing/2014/main" id="{7865A202-BFD7-060C-1C99-41B7B15F56BE}"/>
               </a:ext>
             </a:extLst>
           </p:cNvPr>
@@ -12898,76 +13137,8 @@
         </p:nvCxnSpPr>
         <p:spPr>
           <a:xfrm>
-            <a:off x="457665" y="913214"/>
-            <a:ext cx="0" cy="182880"/>
-          </a:xfrm>
-          <a:prstGeom prst="straightConnector1">
-            <a:avLst/>
-          </a:prstGeom>
-          <a:noFill/>
-          <a:ln w="19050" cap="flat" cmpd="sng">
-            <a:solidFill>
-              <a:schemeClr val="dk2"/>
-            </a:solidFill>
-            <a:prstDash val="dash"/>
-            <a:round/>
-            <a:headEnd type="none" w="med" len="med"/>
-            <a:tailEnd type="none" w="med" len="med"/>
-          </a:ln>
-        </p:spPr>
-      </p:cxnSp>
-      <p:cxnSp>
-        <p:nvCxnSpPr>
-          <p:cNvPr id="296" name="Google Shape;201;p13">
-            <a:extLst>
-              <a:ext uri="{FF2B5EF4-FFF2-40B4-BE49-F238E27FC236}">
-                <a16:creationId xmlns:a16="http://schemas.microsoft.com/office/drawing/2014/main" id="{DF984D44-1D17-CE5C-0EB3-88A5D03E8A0A}"/>
-              </a:ext>
-            </a:extLst>
-          </p:cNvPr>
-          <p:cNvCxnSpPr>
-            <a:cxnSpLocks/>
-          </p:cNvCxnSpPr>
-          <p:nvPr/>
-        </p:nvCxnSpPr>
-        <p:spPr>
-          <a:xfrm>
-            <a:off x="457665" y="1262234"/>
-            <a:ext cx="0" cy="182880"/>
-          </a:xfrm>
-          <a:prstGeom prst="straightConnector1">
-            <a:avLst/>
-          </a:prstGeom>
-          <a:noFill/>
-          <a:ln w="19050" cap="flat" cmpd="sng">
-            <a:solidFill>
-              <a:schemeClr val="dk2"/>
-            </a:solidFill>
-            <a:prstDash val="dash"/>
-            <a:round/>
-            <a:headEnd type="none" w="med" len="med"/>
-            <a:tailEnd type="none" w="med" len="med"/>
-          </a:ln>
-        </p:spPr>
-      </p:cxnSp>
-      <p:cxnSp>
-        <p:nvCxnSpPr>
-          <p:cNvPr id="297" name="Google Shape;202;p13">
-            <a:extLst>
-              <a:ext uri="{FF2B5EF4-FFF2-40B4-BE49-F238E27FC236}">
-                <a16:creationId xmlns:a16="http://schemas.microsoft.com/office/drawing/2014/main" id="{A7C3C6DC-A0F0-978A-2494-F309BD65FBD4}"/>
-              </a:ext>
-            </a:extLst>
-          </p:cNvPr>
-          <p:cNvCxnSpPr>
-            <a:cxnSpLocks/>
-          </p:cNvCxnSpPr>
-          <p:nvPr/>
-        </p:nvCxnSpPr>
-        <p:spPr>
-          <a:xfrm>
-            <a:off x="457665" y="1909640"/>
-            <a:ext cx="0" cy="137160"/>
+            <a:off x="459016" y="3014767"/>
+            <a:ext cx="131" cy="137124"/>
           </a:xfrm>
           <a:prstGeom prst="straightConnector1">
             <a:avLst/>
@@ -12986,10 +13157,10 @@
       </p:cxnSp>
       <p:cxnSp>
         <p:nvCxnSpPr>
-          <p:cNvPr id="298" name="Google Shape;204;p13">
-            <a:extLst>
-              <a:ext uri="{FF2B5EF4-FFF2-40B4-BE49-F238E27FC236}">
-                <a16:creationId xmlns:a16="http://schemas.microsoft.com/office/drawing/2014/main" id="{BE52F484-3861-32B3-8A8A-B7C1E595B46C}"/>
+          <p:cNvPr id="195" name="Google Shape;62;p13">
+            <a:extLst>
+              <a:ext uri="{FF2B5EF4-FFF2-40B4-BE49-F238E27FC236}">
+                <a16:creationId xmlns:a16="http://schemas.microsoft.com/office/drawing/2014/main" id="{24CF14B6-79D2-FAED-5B6B-5ADDDCC83B1D}"/>
               </a:ext>
             </a:extLst>
           </p:cNvPr>
@@ -13000,7 +13171,180 @@
         </p:nvCxnSpPr>
         <p:spPr>
           <a:xfrm>
-            <a:off x="457665" y="318854"/>
+            <a:off x="459016" y="3335409"/>
+            <a:ext cx="131" cy="137124"/>
+          </a:xfrm>
+          <a:prstGeom prst="straightConnector1">
+            <a:avLst/>
+          </a:prstGeom>
+          <a:noFill/>
+          <a:ln w="19050" cap="flat" cmpd="sng">
+            <a:solidFill>
+              <a:srgbClr val="000000"/>
+            </a:solidFill>
+            <a:prstDash val="solid"/>
+            <a:miter lim="800000"/>
+            <a:headEnd type="none" w="sm" len="sm"/>
+            <a:tailEnd type="triangle" w="med" len="med"/>
+          </a:ln>
+        </p:spPr>
+      </p:cxnSp>
+      <p:cxnSp>
+        <p:nvCxnSpPr>
+          <p:cNvPr id="196" name="Google Shape;62;p13">
+            <a:extLst>
+              <a:ext uri="{FF2B5EF4-FFF2-40B4-BE49-F238E27FC236}">
+                <a16:creationId xmlns:a16="http://schemas.microsoft.com/office/drawing/2014/main" id="{F0686776-BADC-7779-86BE-0928FCED7934}"/>
+              </a:ext>
+            </a:extLst>
+          </p:cNvPr>
+          <p:cNvCxnSpPr>
+            <a:cxnSpLocks/>
+          </p:cNvCxnSpPr>
+          <p:nvPr/>
+        </p:nvCxnSpPr>
+        <p:spPr>
+          <a:xfrm>
+            <a:off x="459016" y="3656051"/>
+            <a:ext cx="131" cy="137124"/>
+          </a:xfrm>
+          <a:prstGeom prst="straightConnector1">
+            <a:avLst/>
+          </a:prstGeom>
+          <a:noFill/>
+          <a:ln w="19050" cap="flat" cmpd="sng">
+            <a:solidFill>
+              <a:srgbClr val="000000"/>
+            </a:solidFill>
+            <a:prstDash val="solid"/>
+            <a:miter lim="800000"/>
+            <a:headEnd type="none" w="sm" len="sm"/>
+            <a:tailEnd type="triangle" w="med" len="med"/>
+          </a:ln>
+        </p:spPr>
+      </p:cxnSp>
+      <p:sp>
+        <p:nvSpPr>
+          <p:cNvPr id="197" name="Google Shape;54;p13">
+            <a:extLst>
+              <a:ext uri="{FF2B5EF4-FFF2-40B4-BE49-F238E27FC236}">
+                <a16:creationId xmlns:a16="http://schemas.microsoft.com/office/drawing/2014/main" id="{0BF2EA03-C82E-DF24-1FC3-9BE4B6E624AA}"/>
+              </a:ext>
+            </a:extLst>
+          </p:cNvPr>
+          <p:cNvSpPr/>
+          <p:nvPr/>
+        </p:nvSpPr>
+        <p:spPr>
+          <a:xfrm>
+            <a:off x="81207" y="1071366"/>
+            <a:ext cx="733663" cy="328600"/>
+          </a:xfrm>
+          <a:prstGeom prst="roundRect">
+            <a:avLst>
+              <a:gd name="adj" fmla="val 10146"/>
+            </a:avLst>
+          </a:prstGeom>
+          <a:solidFill>
+            <a:schemeClr val="accent3">
+              <a:lumMod val="60000"/>
+              <a:lumOff val="40000"/>
+            </a:schemeClr>
+          </a:solidFill>
+          <a:ln>
+            <a:noFill/>
+          </a:ln>
+        </p:spPr>
+        <p:txBody>
+          <a:bodyPr spcFirstLastPara="1" wrap="square" lIns="91425" tIns="45700" rIns="91425" bIns="45700" anchor="ctr" anchorCtr="0">
+            <a:noAutofit/>
+          </a:bodyPr>
+          <a:lstStyle/>
+          <a:p>
+            <a:pPr marL="0" marR="0" lvl="0" indent="0" algn="ctr" rtl="0">
+              <a:spcBef>
+                <a:spcPts val="0"/>
+              </a:spcBef>
+              <a:spcAft>
+                <a:spcPts val="0"/>
+              </a:spcAft>
+              <a:buNone/>
+            </a:pPr>
+            <a:r>
+              <a:rPr lang="en-US" sz="1000" dirty="0">
+                <a:solidFill>
+                  <a:schemeClr val="tx1"/>
+                </a:solidFill>
+                <a:latin typeface="Arial"/>
+                <a:ea typeface="Arial"/>
+                <a:cs typeface="Arial"/>
+                <a:sym typeface="Arial"/>
+              </a:rPr>
+              <a:t>AFT Block (C)</a:t>
+            </a:r>
+            <a:endParaRPr sz="1000" dirty="0">
+              <a:solidFill>
+                <a:schemeClr val="tx1"/>
+              </a:solidFill>
+              <a:latin typeface="Arial"/>
+              <a:ea typeface="Arial"/>
+              <a:cs typeface="Arial"/>
+              <a:sym typeface="Arial"/>
+            </a:endParaRPr>
+          </a:p>
+        </p:txBody>
+      </p:sp>
+      <p:cxnSp>
+        <p:nvCxnSpPr>
+          <p:cNvPr id="198" name="Google Shape;202;p13">
+            <a:extLst>
+              <a:ext uri="{FF2B5EF4-FFF2-40B4-BE49-F238E27FC236}">
+                <a16:creationId xmlns:a16="http://schemas.microsoft.com/office/drawing/2014/main" id="{92B83B03-F45D-EFDF-890E-B44FE6B6B85B}"/>
+              </a:ext>
+            </a:extLst>
+          </p:cNvPr>
+          <p:cNvCxnSpPr>
+            <a:cxnSpLocks/>
+          </p:cNvCxnSpPr>
+          <p:nvPr/>
+        </p:nvCxnSpPr>
+        <p:spPr>
+          <a:xfrm>
+            <a:off x="448038" y="1718393"/>
+            <a:ext cx="0" cy="137160"/>
+          </a:xfrm>
+          <a:prstGeom prst="straightConnector1">
+            <a:avLst/>
+          </a:prstGeom>
+          <a:noFill/>
+          <a:ln w="19050" cap="flat" cmpd="sng">
+            <a:solidFill>
+              <a:srgbClr val="000000"/>
+            </a:solidFill>
+            <a:prstDash val="solid"/>
+            <a:miter lim="800000"/>
+            <a:headEnd type="none" w="sm" len="sm"/>
+            <a:tailEnd type="triangle" w="med" len="med"/>
+          </a:ln>
+        </p:spPr>
+      </p:cxnSp>
+      <p:cxnSp>
+        <p:nvCxnSpPr>
+          <p:cNvPr id="199" name="Google Shape;202;p13">
+            <a:extLst>
+              <a:ext uri="{FF2B5EF4-FFF2-40B4-BE49-F238E27FC236}">
+                <a16:creationId xmlns:a16="http://schemas.microsoft.com/office/drawing/2014/main" id="{ABC5E3BF-75B9-2B3E-A699-A32045FA076E}"/>
+              </a:ext>
+            </a:extLst>
+          </p:cNvPr>
+          <p:cNvCxnSpPr>
+            <a:cxnSpLocks/>
+          </p:cNvCxnSpPr>
+          <p:nvPr/>
+        </p:nvCxnSpPr>
+        <p:spPr>
+          <a:xfrm>
+            <a:off x="448038" y="291521"/>
             <a:ext cx="0" cy="137160"/>
           </a:xfrm>
           <a:prstGeom prst="straightConnector1">
